--- a/curso_es/pptx/S15.pptx
+++ b/curso_es/pptx/S15.pptx
@@ -3801,7 +3801,7 @@
                 </a:solidFill>
                 <a:latin typeface="Nunito Sans"/>
               </a:rPr>
-              <a:t>Leire: «Podríamos dejar el móvil en la mochila durante la comida». Dylan: «Claro, tú quieres prohibir los móviles y volver a la Edad Media».</a:t>
+              <a:t>Una chica: «Podríamos dejar el móvil en la mochila durante la comida». Un chico: «Claro, tú quieres prohibir los móviles y volver a la Edad Media».</a:t>
             </a:r>
           </a:p>
         </p:txBody>
@@ -3849,7 +3849,7 @@
                 </a:solidFill>
                 <a:latin typeface="Nunito Sans"/>
               </a:rPr>
-              <a:t>¿Qué dijo Leire? Dejar el móvil en la mochila durante la comida.</a:t>
+              <a:t>¿Qué dijo la chica? Dejar el móvil en la mochila durante la comida.</a:t>
             </a:r>
           </a:p>
           <a:p>
@@ -3874,7 +3874,7 @@
                 </a:solidFill>
                 <a:latin typeface="Nunito Sans"/>
               </a:rPr>
-              <a:t>¿Qué ataca Dylan? «Prohibir los móviles» y «la Edad Media».</a:t>
+              <a:t>¿Qué ataca el chico? «Prohibir los móviles» y «la Edad Media».</a:t>
             </a:r>
           </a:p>
           <a:p>
@@ -3924,7 +3924,7 @@
                 </a:solidFill>
                 <a:latin typeface="Nunito Sans"/>
               </a:rPr>
-              <a:t>Conclusión: hombre de paja. La idea real de Leire sigue sin respuesta.</a:t>
+              <a:t>Conclusión: hombre de paja. La idea real de la chica sigue sin respuesta.</a:t>
             </a:r>
           </a:p>
         </p:txBody>
@@ -4110,7 +4110,7 @@
                 </a:solidFill>
                 <a:latin typeface="Nunito Sans"/>
               </a:rPr>
-              <a:t>Chen comenta en un vídeo: «Tenía demasiados anuncios». Otro usuario responde: «O sea, que los creadores deberían trabajar gratis. Qué fácil».</a:t>
+              <a:t>Un chico comenta en un vídeo: «Tenía demasiados anuncios». Otro usuario responde: «O sea, que los creadores deberían trabajar gratis. Qué fácil».</a:t>
             </a:r>
           </a:p>
         </p:txBody>
@@ -4158,7 +4158,7 @@
                 </a:solidFill>
                 <a:latin typeface="Nunito Sans"/>
               </a:rPr>
-              <a:t>¿Qué dijo Chen? Que había demasiados anuncios.</a:t>
+              <a:t>¿Qué dijo el chico? Que había demasiados anuncios.</a:t>
             </a:r>
           </a:p>
           <a:p>
@@ -4208,7 +4208,7 @@
                 </a:solidFill>
                 <a:latin typeface="Nunito Sans"/>
               </a:rPr>
-              <a:t>¿Dijo eso Chen? No: menos anuncios no es cero dinero.</a:t>
+              <a:t>¿Dijo eso el chico? No: menos anuncios no es cero dinero.</a:t>
             </a:r>
           </a:p>
           <a:p>
@@ -4419,7 +4419,7 @@
                 </a:solidFill>
                 <a:latin typeface="Nunito Sans"/>
               </a:rPr>
-              <a:t>Naiara: «Los deberes de los viernes deberían ser cortos». Omar: «Propones menos deberes el fin de semana. No estoy de acuerdo: el lunes hay examen».</a:t>
+              <a:t>Una chica: «Los deberes de los viernes deberían ser cortos». Un chico: «Propones menos deberes el fin de semana. No estoy de acuerdo: el lunes hay examen».</a:t>
             </a:r>
           </a:p>
         </p:txBody>
@@ -4467,7 +4467,7 @@
                 </a:solidFill>
                 <a:latin typeface="Nunito Sans"/>
               </a:rPr>
-              <a:t>¿Resume bien Omar? Sí: «cortos» es «menos deberes».</a:t>
+              <a:t>¿Resume bien el chico? Sí: «cortos» es «menos deberes».</a:t>
             </a:r>
           </a:p>
           <a:p>
@@ -5296,7 +5296,7 @@
                 </a:solidFill>
                 <a:latin typeface="Nunito Sans"/>
               </a:rPr>
-              <a:t>Aitor: «Los deberes no sirven para nada: hay que quitarlos todos». Maialen: «Aitor quiere quitar todos los deberes, y no estoy de acuerdo».</a:t>
+              <a:t>Un chico: «Los deberes no sirven para nada: hay que quitarlos todos». Una chica: «Este chico quiere quitar todos los deberes, y no estoy de acuerdo».</a:t>
             </a:r>
           </a:p>
         </p:txBody>
@@ -5394,7 +5394,7 @@
                 </a:solidFill>
                 <a:latin typeface="Nunito Sans"/>
               </a:rPr>
-              <a:t>Pero ¿lo dijo Aitor? Sí: «hay que quitarlos todos».</a:t>
+              <a:t>Pero ¿lo dijo el chico? Sí: «hay que quitarlos todos».</a:t>
             </a:r>
           </a:p>
           <a:p>
@@ -5419,7 +5419,7 @@
                 </a:solidFill>
                 <a:latin typeface="Nunito Sans"/>
               </a:rPr>
-              <a:t>Aitor diría: «sí, eso digo». Es un </a:t>
+              <a:t>El chico diría: «sí, eso digo». Es un </a:t>
             </a:r>
             <a:r>
               <a:rPr sz="2400" b="1">
@@ -6569,7 +6569,7 @@
                 </a:solidFill>
                 <a:latin typeface="Nunito Sans"/>
               </a:rPr>
-              <a:t>En latín, ad hominem significa «contra la ______».  (sesión 14)</a:t>
+              <a:t>El ataque a la persona habla de quien lo dice, no de la ______.  (sesión 14)</a:t>
             </a:r>
           </a:p>
           <a:p>
@@ -6771,7 +6771,7 @@
                 </a:solidFill>
                 <a:latin typeface="Nunito Sans"/>
               </a:rPr>
-              <a:t>En latín, ad hominem significa «contra la </a:t>
+              <a:t>El ataque a la persona habla de quien lo dice, no de la </a:t>
             </a:r>
             <a:r>
               <a:rPr sz="2600" b="1">
@@ -6780,7 +6780,7 @@
                 </a:solidFill>
                 <a:latin typeface="Nunito Sans"/>
               </a:rPr>
-              <a:t>persona</a:t>
+              <a:t>idea</a:t>
             </a:r>
             <a:r>
               <a:rPr sz="2600" b="0">
@@ -6789,7 +6789,7 @@
                 </a:solidFill>
                 <a:latin typeface="Nunito Sans"/>
               </a:rPr>
-              <a:t>».  (sesión 14)</a:t>
+              <a:t>.  (sesión 14)</a:t>
             </a:r>
           </a:p>
           <a:p>
@@ -7022,7 +7022,7 @@
                 </a:solidFill>
                 <a:latin typeface="Nunito Sans"/>
               </a:rPr>
-              <a:t>Leire: «Podríamos dejar el móvil en la mochila durante la comida». Dylan: «Claro, tú quieres prohibir los móviles y volver a la Edad Media».</a:t>
+              <a:t>Una chica: «Podríamos dejar el móvil en la mochila durante la comida». Un chico: «Claro, tú quieres prohibir los móviles y volver a la Edad Media».</a:t>
             </a:r>
           </a:p>
         </p:txBody>
@@ -7061,7 +7061,7 @@
                 </a:solidFill>
                 <a:latin typeface="Nunito Sans"/>
               </a:rPr>
-              <a:t>¿Ha dicho eso Leire? ¿Contra qué idea está peleando Dylan?</a:t>
+              <a:t>¿Ha dicho eso la chica? ¿Contra qué idea está peleando el chico?</a:t>
             </a:r>
           </a:p>
         </p:txBody>
